--- a/files/lecture_2.pptx
+++ b/files/lecture_2.pptx
@@ -8289,34 +8289,297 @@
           </a:p>
         </p:txBody>
       </p:sp>
-      <p:sp>
-        <p:nvSpPr>
-          <p:cNvPr id="3" name="Text Placeholder 2">
-            <a:extLst>
-              <a:ext uri="{FF2B5EF4-FFF2-40B4-BE49-F238E27FC236}">
-                <a16:creationId xmlns:a16="http://schemas.microsoft.com/office/drawing/2014/main" id="{EB97B620-B7CD-2D35-2968-9A7F64DD99EC}"/>
-              </a:ext>
-            </a:extLst>
-          </p:cNvPr>
-          <p:cNvSpPr>
-            <a:spLocks noGrp="1"/>
-          </p:cNvSpPr>
-          <p:nvPr>
-            <p:ph type="body" idx="1"/>
-          </p:nvPr>
-        </p:nvSpPr>
-        <p:spPr/>
-        <p:txBody>
-          <a:bodyPr/>
-          <a:lstStyle/>
-          <a:p>
-            <a:r>
-              <a:rPr lang="en-US" dirty="0"/>
-              <a:t>Whiteboard: definitions, examples</a:t>
-            </a:r>
-          </a:p>
-        </p:txBody>
-      </p:sp>
+      <mc:AlternateContent xmlns:mc="http://schemas.openxmlformats.org/markup-compatibility/2006">
+        <mc:Choice xmlns:a14="http://schemas.microsoft.com/office/drawing/2010/main" Requires="a14">
+          <p:sp>
+            <p:nvSpPr>
+              <p:cNvPr id="3" name="Text Placeholder 2">
+                <a:extLst>
+                  <a:ext uri="{FF2B5EF4-FFF2-40B4-BE49-F238E27FC236}">
+                    <a16:creationId xmlns:a16="http://schemas.microsoft.com/office/drawing/2014/main" id="{EB97B620-B7CD-2D35-2968-9A7F64DD99EC}"/>
+                  </a:ext>
+                </a:extLst>
+              </p:cNvPr>
+              <p:cNvSpPr>
+                <a:spLocks noGrp="1"/>
+              </p:cNvSpPr>
+              <p:nvPr>
+                <p:ph type="body" idx="1"/>
+              </p:nvPr>
+            </p:nvSpPr>
+            <p:spPr/>
+            <p:txBody>
+              <a:bodyPr/>
+              <a:lstStyle/>
+              <a:p>
+                <a14:m>
+                  <m:oMathPara xmlns:m="http://schemas.openxmlformats.org/officeDocument/2006/math">
+                    <m:oMath>
+                      <m:sSub>
+                        <m:sSubPr>
+                          <m:ctrlPr>
+                            <a:rPr lang="en-US" i="1" smtClean="0">
+                              <a:latin typeface="Cambria Math" panose="02040503050406030204" pitchFamily="18" charset="0"/>
+                            </a:rPr>
+                          </m:ctrlPr>
+                        </m:sSubPr>
+                        <m:e>
+                          <m:d>
+                            <m:dPr>
+                              <m:begChr m:val="‖"/>
+                              <m:endChr m:val="‖"/>
+                              <m:ctrlPr>
+                                <a:rPr lang="en-US" b="0" i="1" smtClean="0">
+                                  <a:latin typeface="Cambria Math" panose="02040503050406030204" pitchFamily="18" charset="0"/>
+                                </a:rPr>
+                              </m:ctrlPr>
+                            </m:dPr>
+                            <m:e>
+                              <m:r>
+                                <a:rPr lang="en-US" b="0" i="1" smtClean="0">
+                                  <a:latin typeface="Cambria Math" panose="02040503050406030204" pitchFamily="18" charset="0"/>
+                                </a:rPr>
+                                <m:t>𝑥</m:t>
+                              </m:r>
+                            </m:e>
+                          </m:d>
+                        </m:e>
+                        <m:sub>
+                          <m:r>
+                            <a:rPr lang="en-US" b="0" i="1" smtClean="0">
+                              <a:latin typeface="Cambria Math" panose="02040503050406030204" pitchFamily="18" charset="0"/>
+                            </a:rPr>
+                            <m:t>𝑝</m:t>
+                          </m:r>
+                        </m:sub>
+                      </m:sSub>
+                      <m:r>
+                        <a:rPr lang="en-US" b="0" i="1" smtClean="0">
+                          <a:latin typeface="Cambria Math" panose="02040503050406030204" pitchFamily="18" charset="0"/>
+                        </a:rPr>
+                        <m:t>= </m:t>
+                      </m:r>
+                      <m:sSup>
+                        <m:sSupPr>
+                          <m:ctrlPr>
+                            <a:rPr lang="en-US" b="0" i="1" smtClean="0">
+                              <a:latin typeface="Cambria Math" panose="02040503050406030204" pitchFamily="18" charset="0"/>
+                            </a:rPr>
+                          </m:ctrlPr>
+                        </m:sSupPr>
+                        <m:e>
+                          <m:d>
+                            <m:dPr>
+                              <m:ctrlPr>
+                                <a:rPr lang="en-US" b="0" i="1" smtClean="0">
+                                  <a:latin typeface="Cambria Math" panose="02040503050406030204" pitchFamily="18" charset="0"/>
+                                </a:rPr>
+                              </m:ctrlPr>
+                            </m:dPr>
+                            <m:e>
+                              <m:nary>
+                                <m:naryPr>
+                                  <m:chr m:val="∑"/>
+                                  <m:ctrlPr>
+                                    <a:rPr lang="en-US" b="0" i="1" smtClean="0">
+                                      <a:latin typeface="Cambria Math" panose="02040503050406030204" pitchFamily="18" charset="0"/>
+                                    </a:rPr>
+                                  </m:ctrlPr>
+                                </m:naryPr>
+                                <m:sub>
+                                  <m:r>
+                                    <m:rPr>
+                                      <m:brk m:alnAt="23"/>
+                                    </m:rPr>
+                                    <a:rPr lang="en-US" b="0" i="1" smtClean="0">
+                                      <a:latin typeface="Cambria Math" panose="02040503050406030204" pitchFamily="18" charset="0"/>
+                                    </a:rPr>
+                                    <m:t> </m:t>
+                                  </m:r>
+                                  <m:r>
+                                    <m:rPr>
+                                      <m:brk m:alnAt="23"/>
+                                    </m:rPr>
+                                    <a:rPr lang="en-US" b="0" i="1" smtClean="0">
+                                      <a:latin typeface="Cambria Math" panose="02040503050406030204" pitchFamily="18" charset="0"/>
+                                    </a:rPr>
+                                    <m:t>𝑖</m:t>
+                                  </m:r>
+                                  <m:r>
+                                    <m:rPr>
+                                      <m:brk m:alnAt="23"/>
+                                    </m:rPr>
+                                    <a:rPr lang="en-US" b="0" i="1" smtClean="0">
+                                      <a:latin typeface="Cambria Math" panose="02040503050406030204" pitchFamily="18" charset="0"/>
+                                    </a:rPr>
+                                    <m:t>=</m:t>
+                                  </m:r>
+                                  <m:r>
+                                    <m:rPr>
+                                      <m:brk m:alnAt="23"/>
+                                    </m:rPr>
+                                    <a:rPr lang="en-US" b="0" i="1" smtClean="0">
+                                      <a:latin typeface="Cambria Math" panose="02040503050406030204" pitchFamily="18" charset="0"/>
+                                    </a:rPr>
+                                    <m:t>1</m:t>
+                                  </m:r>
+                                </m:sub>
+                                <m:sup>
+                                  <m:r>
+                                    <a:rPr lang="en-US" b="0" i="1" smtClean="0">
+                                      <a:latin typeface="Cambria Math" panose="02040503050406030204" pitchFamily="18" charset="0"/>
+                                    </a:rPr>
+                                    <m:t>𝑛</m:t>
+                                  </m:r>
+                                </m:sup>
+                                <m:e>
+                                  <m:sSup>
+                                    <m:sSupPr>
+                                      <m:ctrlPr>
+                                        <a:rPr lang="en-US" b="0" i="1" smtClean="0">
+                                          <a:latin typeface="Cambria Math" panose="02040503050406030204" pitchFamily="18" charset="0"/>
+                                        </a:rPr>
+                                      </m:ctrlPr>
+                                    </m:sSupPr>
+                                    <m:e>
+                                      <m:d>
+                                        <m:dPr>
+                                          <m:begChr m:val="|"/>
+                                          <m:endChr m:val="|"/>
+                                          <m:ctrlPr>
+                                            <a:rPr lang="en-US" b="0" i="1" smtClean="0">
+                                              <a:latin typeface="Cambria Math" panose="02040503050406030204" pitchFamily="18" charset="0"/>
+                                            </a:rPr>
+                                          </m:ctrlPr>
+                                        </m:dPr>
+                                        <m:e>
+                                          <m:sSub>
+                                            <m:sSubPr>
+                                              <m:ctrlPr>
+                                                <a:rPr lang="en-US" b="0" i="1" smtClean="0">
+                                                  <a:latin typeface="Cambria Math" panose="02040503050406030204" pitchFamily="18" charset="0"/>
+                                                </a:rPr>
+                                              </m:ctrlPr>
+                                            </m:sSubPr>
+                                            <m:e>
+                                              <m:r>
+                                                <a:rPr lang="en-US" b="0" i="1" smtClean="0">
+                                                  <a:latin typeface="Cambria Math" panose="02040503050406030204" pitchFamily="18" charset="0"/>
+                                                </a:rPr>
+                                                <m:t>𝑥</m:t>
+                                              </m:r>
+                                            </m:e>
+                                            <m:sub>
+                                              <m:r>
+                                                <a:rPr lang="en-US" b="0" i="1" smtClean="0">
+                                                  <a:latin typeface="Cambria Math" panose="02040503050406030204" pitchFamily="18" charset="0"/>
+                                                </a:rPr>
+                                                <m:t>𝑖</m:t>
+                                              </m:r>
+                                            </m:sub>
+                                          </m:sSub>
+                                        </m:e>
+                                      </m:d>
+                                    </m:e>
+                                    <m:sup>
+                                      <m:r>
+                                        <a:rPr lang="en-US" b="0" i="1" smtClean="0">
+                                          <a:latin typeface="Cambria Math" panose="02040503050406030204" pitchFamily="18" charset="0"/>
+                                        </a:rPr>
+                                        <m:t>𝑝</m:t>
+                                      </m:r>
+                                    </m:sup>
+                                  </m:sSup>
+                                </m:e>
+                              </m:nary>
+                            </m:e>
+                          </m:d>
+                        </m:e>
+                        <m:sup>
+                          <m:f>
+                            <m:fPr>
+                              <m:ctrlPr>
+                                <a:rPr lang="en-US" b="0" i="1" smtClean="0">
+                                  <a:latin typeface="Cambria Math" panose="02040503050406030204" pitchFamily="18" charset="0"/>
+                                </a:rPr>
+                              </m:ctrlPr>
+                            </m:fPr>
+                            <m:num>
+                              <m:r>
+                                <a:rPr lang="en-US" b="0" i="1" smtClean="0">
+                                  <a:latin typeface="Cambria Math" panose="02040503050406030204" pitchFamily="18" charset="0"/>
+                                </a:rPr>
+                                <m:t>1</m:t>
+                              </m:r>
+                            </m:num>
+                            <m:den>
+                              <m:r>
+                                <a:rPr lang="en-US" b="0" i="1" smtClean="0">
+                                  <a:latin typeface="Cambria Math" panose="02040503050406030204" pitchFamily="18" charset="0"/>
+                                </a:rPr>
+                                <m:t>𝑝</m:t>
+                              </m:r>
+                            </m:den>
+                          </m:f>
+                        </m:sup>
+                      </m:sSup>
+                    </m:oMath>
+                  </m:oMathPara>
+                </a14:m>
+                <a:endParaRPr lang="en-US" dirty="0"/>
+              </a:p>
+              <a:p>
+                <a:endParaRPr lang="en-US" dirty="0"/>
+              </a:p>
+              <a:p>
+                <a:r>
+                  <a:rPr lang="en-US" dirty="0"/>
+                  <a:t>Whiteboard: examples</a:t>
+                </a:r>
+              </a:p>
+            </p:txBody>
+          </p:sp>
+        </mc:Choice>
+        <mc:Fallback>
+          <p:sp>
+            <p:nvSpPr>
+              <p:cNvPr id="3" name="Text Placeholder 2">
+                <a:extLst>
+                  <a:ext uri="{FF2B5EF4-FFF2-40B4-BE49-F238E27FC236}">
+                    <a16:creationId xmlns:a16="http://schemas.microsoft.com/office/drawing/2014/main" id="{EB97B620-B7CD-2D35-2968-9A7F64DD99EC}"/>
+                  </a:ext>
+                </a:extLst>
+              </p:cNvPr>
+              <p:cNvSpPr>
+                <a:spLocks noGrp="1" noRot="1" noChangeAspect="1" noMove="1" noResize="1" noEditPoints="1" noAdjustHandles="1" noChangeArrowheads="1" noChangeShapeType="1" noTextEdit="1"/>
+              </p:cNvSpPr>
+              <p:nvPr>
+                <p:ph type="body" idx="1"/>
+              </p:nvPr>
+            </p:nvSpPr>
+            <p:spPr>
+              <a:blipFill>
+                <a:blip r:embed="rId2"/>
+                <a:stretch>
+                  <a:fillRect t="-16236"/>
+                </a:stretch>
+              </a:blipFill>
+            </p:spPr>
+            <p:txBody>
+              <a:bodyPr/>
+              <a:lstStyle/>
+              <a:p>
+                <a:r>
+                  <a:rPr lang="en-US">
+                    <a:noFill/>
+                  </a:rPr>
+                  <a:t> </a:t>
+                </a:r>
+              </a:p>
+            </p:txBody>
+          </p:sp>
+        </mc:Fallback>
+      </mc:AlternateContent>
     </p:spTree>
     <p:extLst>
       <p:ext uri="{BB962C8B-B14F-4D97-AF65-F5344CB8AC3E}">
@@ -10341,12 +10604,6 @@
             </a:r>
           </a:p>
           <a:p>
-            <a:r>
-              <a:rPr lang="en-US" dirty="0">
-                <a:hlinkClick r:id="rId2"/>
-              </a:rPr>
-              <a:t>https://www.kaggle.com/datasets/iammustafatz/diabetes-prediction-dataset</a:t>
-            </a:r>
             <a:endParaRPr lang="en-US" dirty="0"/>
           </a:p>
           <a:p>
@@ -10366,6 +10623,36 @@
           </a:p>
         </p:txBody>
       </p:sp>
+      <p:pic>
+        <p:nvPicPr>
+          <p:cNvPr id="4" name="Picture 3">
+            <a:extLst>
+              <a:ext uri="{FF2B5EF4-FFF2-40B4-BE49-F238E27FC236}">
+                <a16:creationId xmlns:a16="http://schemas.microsoft.com/office/drawing/2014/main" id="{1B71CAAD-3A80-E942-C1C2-68F5A641104F}"/>
+              </a:ext>
+            </a:extLst>
+          </p:cNvPr>
+          <p:cNvPicPr>
+            <a:picLocks noChangeAspect="1"/>
+          </p:cNvPicPr>
+          <p:nvPr/>
+        </p:nvPicPr>
+        <p:blipFill>
+          <a:blip r:embed="rId2"/>
+          <a:stretch>
+            <a:fillRect/>
+          </a:stretch>
+        </p:blipFill>
+        <p:spPr>
+          <a:xfrm>
+            <a:off x="4093038" y="1704110"/>
+            <a:ext cx="4593762" cy="3002626"/>
+          </a:xfrm>
+          <a:prstGeom prst="rect">
+            <a:avLst/>
+          </a:prstGeom>
+        </p:spPr>
+      </p:pic>
     </p:spTree>
     <p:extLst>
       <p:ext uri="{BB962C8B-B14F-4D97-AF65-F5344CB8AC3E}">
